--- a/templates/posts/december/05-12-2026-sat-ig-reel-world-soil-day.pptx
+++ b/templates/posts/december/05-12-2026-sat-ig-reel-world-soil-day.pptx
@@ -3802,7 +3802,7 @@
       <p:grpSpPr/>
       <p:pic>
         <p:nvPicPr>
-          <p:cNvPr id="2" name="Picture 1" descr="5721126994222050576.jpg"/>
+          <p:cNvPr id="2" name="Picture 1" descr="9078260033356861979.jpg"/>
           <p:cNvPicPr>
             <a:picLocks noChangeAspect="1"/>
           </p:cNvPicPr>
